--- a/data-eng/decks/w6d1s2.pptx
+++ b/data-eng/decks/w6d1s2.pptx
@@ -3100,7 +3100,7 @@
       <p:grpSpPr/>
       <p:sp>
         <p:nvSpPr>
-          <p:cNvPr id="2" name="Oval 1"/>
+          <p:cNvPr id="2" name="deckgen:decor"/>
           <p:cNvSpPr/>
           <p:nvPr/>
         </p:nvSpPr>
@@ -3130,7 +3130,7 @@
       </p:sp>
       <p:sp>
         <p:nvSpPr>
-          <p:cNvPr id="3" name="Oval 2"/>
+          <p:cNvPr id="3" name="deckgen:decor"/>
           <p:cNvSpPr/>
           <p:nvPr/>
         </p:nvSpPr>
@@ -3160,7 +3160,7 @@
       </p:sp>
       <p:sp>
         <p:nvSpPr>
-          <p:cNvPr id="4" name="Oval 3"/>
+          <p:cNvPr id="4" name="deckgen:decor"/>
           <p:cNvSpPr/>
           <p:nvPr/>
         </p:nvSpPr>
@@ -3190,7 +3190,7 @@
       </p:sp>
       <p:sp>
         <p:nvSpPr>
-          <p:cNvPr id="5" name="Rectangle 4"/>
+          <p:cNvPr id="5" name="deckgen:decor"/>
           <p:cNvSpPr/>
           <p:nvPr/>
         </p:nvSpPr>
@@ -3220,7 +3220,7 @@
       </p:sp>
       <p:sp>
         <p:nvSpPr>
-          <p:cNvPr id="6" name="Oval 5"/>
+          <p:cNvPr id="6" name="deckgen:decor"/>
           <p:cNvSpPr/>
           <p:nvPr/>
         </p:nvSpPr>
@@ -3250,7 +3250,7 @@
       </p:sp>
       <p:sp>
         <p:nvSpPr>
-          <p:cNvPr id="7" name="Oval 6"/>
+          <p:cNvPr id="7" name="deckgen:decor"/>
           <p:cNvSpPr/>
           <p:nvPr/>
         </p:nvSpPr>
@@ -3280,7 +3280,7 @@
       </p:sp>
       <p:sp>
         <p:nvSpPr>
-          <p:cNvPr id="8" name="Oval 7"/>
+          <p:cNvPr id="8" name="deckgen:decor"/>
           <p:cNvSpPr/>
           <p:nvPr/>
         </p:nvSpPr>
@@ -3310,7 +3310,7 @@
       </p:sp>
       <p:sp>
         <p:nvSpPr>
-          <p:cNvPr id="9" name="Oval 8"/>
+          <p:cNvPr id="9" name="deckgen:decor"/>
           <p:cNvSpPr/>
           <p:nvPr/>
         </p:nvSpPr>
@@ -3340,7 +3340,7 @@
       </p:sp>
       <p:sp>
         <p:nvSpPr>
-          <p:cNvPr id="10" name="Rectangle 9"/>
+          <p:cNvPr id="10" name="deckgen:decor"/>
           <p:cNvSpPr/>
           <p:nvPr/>
         </p:nvSpPr>
@@ -3600,7 +3600,7 @@
       <p:grpSpPr/>
       <p:sp>
         <p:nvSpPr>
-          <p:cNvPr id="2" name="Oval 1"/>
+          <p:cNvPr id="2" name="deckgen:decor"/>
           <p:cNvSpPr/>
           <p:nvPr/>
         </p:nvSpPr>
@@ -3630,7 +3630,7 @@
       </p:sp>
       <p:sp>
         <p:nvSpPr>
-          <p:cNvPr id="3" name="Oval 2"/>
+          <p:cNvPr id="3" name="deckgen:decor"/>
           <p:cNvSpPr/>
           <p:nvPr/>
         </p:nvSpPr>
@@ -3660,7 +3660,7 @@
       </p:sp>
       <p:sp>
         <p:nvSpPr>
-          <p:cNvPr id="4" name="Oval 3"/>
+          <p:cNvPr id="4" name="deckgen:decor"/>
           <p:cNvSpPr/>
           <p:nvPr/>
         </p:nvSpPr>
@@ -4671,7 +4671,7 @@
                 <a:ea typeface="Pretendard"/>
                 <a:cs typeface="Pretendard"/>
               </a:rPr>
-              <a:t>GetOffsetShell 의 hello-stream:0:N 이 보낼수록 늘어난다</a:t>
+              <a:t>kafka-get-offsets.sh 의 hello-stream:0:N 이 보낼수록 늘어난다</a:t>
             </a:r>
           </a:p>
         </p:txBody>
@@ -4808,7 +4808,7 @@
       <p:grpSpPr/>
       <p:sp>
         <p:nvSpPr>
-          <p:cNvPr id="2" name="Oval 1"/>
+          <p:cNvPr id="2" name="deckgen:decor"/>
           <p:cNvSpPr/>
           <p:nvPr/>
         </p:nvSpPr>
@@ -4838,7 +4838,7 @@
       </p:sp>
       <p:sp>
         <p:nvSpPr>
-          <p:cNvPr id="3" name="Oval 2"/>
+          <p:cNvPr id="3" name="deckgen:decor"/>
           <p:cNvSpPr/>
           <p:nvPr/>
         </p:nvSpPr>
@@ -5590,7 +5590,7 @@
                 <a:ea typeface="Pretendard"/>
                 <a:cs typeface="Pretendard"/>
               </a:rPr>
-              <a:t>GetOffsetShell 이 찍은 파티션별 오프셋</a:t>
+              <a:t>kafka-get-offsets.sh 가 찍은 파티션별 오프셋</a:t>
             </a:r>
           </a:p>
         </p:txBody>
@@ -5615,7 +5615,7 @@
       <p:grpSpPr/>
       <p:sp>
         <p:nvSpPr>
-          <p:cNvPr id="2" name="Oval 1"/>
+          <p:cNvPr id="2" name="deckgen:decor"/>
           <p:cNvSpPr/>
           <p:nvPr/>
         </p:nvSpPr>
@@ -5645,7 +5645,7 @@
       </p:sp>
       <p:sp>
         <p:nvSpPr>
-          <p:cNvPr id="3" name="Oval 2"/>
+          <p:cNvPr id="3" name="deckgen:decor"/>
           <p:cNvSpPr/>
           <p:nvPr/>
         </p:nvSpPr>
@@ -5675,7 +5675,7 @@
       </p:sp>
       <p:sp>
         <p:nvSpPr>
-          <p:cNvPr id="4" name="Oval 3"/>
+          <p:cNvPr id="4" name="deckgen:decor"/>
           <p:cNvSpPr/>
           <p:nvPr/>
         </p:nvSpPr>
@@ -6606,7 +6606,7 @@
       <p:grpSpPr/>
       <p:sp>
         <p:nvSpPr>
-          <p:cNvPr id="2" name="Oval 1"/>
+          <p:cNvPr id="2" name="deckgen:decor"/>
           <p:cNvSpPr/>
           <p:nvPr/>
         </p:nvSpPr>
@@ -6636,7 +6636,7 @@
       </p:sp>
       <p:sp>
         <p:nvSpPr>
-          <p:cNvPr id="3" name="Oval 2"/>
+          <p:cNvPr id="3" name="deckgen:decor"/>
           <p:cNvSpPr/>
           <p:nvPr/>
         </p:nvSpPr>
@@ -6666,7 +6666,7 @@
       </p:sp>
       <p:sp>
         <p:nvSpPr>
-          <p:cNvPr id="4" name="Oval 3"/>
+          <p:cNvPr id="4" name="deckgen:decor"/>
           <p:cNvSpPr/>
           <p:nvPr/>
         </p:nvSpPr>
@@ -7800,7 +7800,7 @@
       <p:grpSpPr/>
       <p:sp>
         <p:nvSpPr>
-          <p:cNvPr id="2" name="Oval 1"/>
+          <p:cNvPr id="2" name="deckgen:decor"/>
           <p:cNvSpPr/>
           <p:nvPr/>
         </p:nvSpPr>
@@ -7830,7 +7830,7 @@
       </p:sp>
       <p:sp>
         <p:nvSpPr>
-          <p:cNvPr id="3" name="Oval 2"/>
+          <p:cNvPr id="3" name="deckgen:decor"/>
           <p:cNvSpPr/>
           <p:nvPr/>
         </p:nvSpPr>
@@ -7860,7 +7860,7 @@
       </p:sp>
       <p:sp>
         <p:nvSpPr>
-          <p:cNvPr id="4" name="Oval 3"/>
+          <p:cNvPr id="4" name="deckgen:decor"/>
           <p:cNvSpPr/>
           <p:nvPr/>
         </p:nvSpPr>
@@ -8898,7 +8898,7 @@
       <p:grpSpPr/>
       <p:sp>
         <p:nvSpPr>
-          <p:cNvPr id="2" name="Oval 1"/>
+          <p:cNvPr id="2" name="deckgen:decor"/>
           <p:cNvSpPr/>
           <p:nvPr/>
         </p:nvSpPr>
@@ -8928,7 +8928,7 @@
       </p:sp>
       <p:sp>
         <p:nvSpPr>
-          <p:cNvPr id="3" name="Oval 2"/>
+          <p:cNvPr id="3" name="deckgen:decor"/>
           <p:cNvSpPr/>
           <p:nvPr/>
         </p:nvSpPr>
@@ -8958,7 +8958,7 @@
       </p:sp>
       <p:sp>
         <p:nvSpPr>
-          <p:cNvPr id="4" name="Oval 3"/>
+          <p:cNvPr id="4" name="deckgen:decor"/>
           <p:cNvSpPr/>
           <p:nvPr/>
         </p:nvSpPr>
@@ -10091,7 +10091,7 @@
       <p:grpSpPr/>
       <p:sp>
         <p:nvSpPr>
-          <p:cNvPr id="2" name="Oval 1"/>
+          <p:cNvPr id="2" name="deckgen:decor"/>
           <p:cNvSpPr/>
           <p:nvPr/>
         </p:nvSpPr>
@@ -10121,7 +10121,7 @@
       </p:sp>
       <p:sp>
         <p:nvSpPr>
-          <p:cNvPr id="3" name="Oval 2"/>
+          <p:cNvPr id="3" name="deckgen:decor"/>
           <p:cNvSpPr/>
           <p:nvPr/>
         </p:nvSpPr>
@@ -10151,7 +10151,7 @@
       </p:sp>
       <p:sp>
         <p:nvSpPr>
-          <p:cNvPr id="4" name="Oval 3"/>
+          <p:cNvPr id="4" name="deckgen:decor"/>
           <p:cNvSpPr/>
           <p:nvPr/>
         </p:nvSpPr>
@@ -11184,7 +11184,7 @@
       <p:grpSpPr/>
       <p:sp>
         <p:nvSpPr>
-          <p:cNvPr id="2" name="Oval 1"/>
+          <p:cNvPr id="2" name="deckgen:decor"/>
           <p:cNvSpPr/>
           <p:nvPr/>
         </p:nvSpPr>
@@ -11214,7 +11214,7 @@
       </p:sp>
       <p:sp>
         <p:nvSpPr>
-          <p:cNvPr id="3" name="Oval 2"/>
+          <p:cNvPr id="3" name="deckgen:decor"/>
           <p:cNvSpPr/>
           <p:nvPr/>
         </p:nvSpPr>
@@ -11244,7 +11244,7 @@
       </p:sp>
       <p:sp>
         <p:nvSpPr>
-          <p:cNvPr id="4" name="Oval 3"/>
+          <p:cNvPr id="4" name="deckgen:decor"/>
           <p:cNvSpPr/>
           <p:nvPr/>
         </p:nvSpPr>
@@ -12099,7 +12099,7 @@
                 <a:ea typeface="Pretendard"/>
                 <a:cs typeface="Pretendard"/>
               </a:rPr>
-              <a:t>kafka-run-class.sh kafka.tools.GetOffsetShell --topic hello-stream</a:t>
+              <a:t>kafka-get-offsets.sh --topic hello-stream</a:t>
             </a:r>
           </a:p>
         </p:txBody>
@@ -12277,7 +12277,7 @@
       <p:grpSpPr/>
       <p:sp>
         <p:nvSpPr>
-          <p:cNvPr id="2" name="Oval 1"/>
+          <p:cNvPr id="2" name="deckgen:decor"/>
           <p:cNvSpPr/>
           <p:nvPr/>
         </p:nvSpPr>
@@ -12307,7 +12307,7 @@
       </p:sp>
       <p:sp>
         <p:nvSpPr>
-          <p:cNvPr id="3" name="Oval 2"/>
+          <p:cNvPr id="3" name="deckgen:decor"/>
           <p:cNvSpPr/>
           <p:nvPr/>
         </p:nvSpPr>
@@ -12337,7 +12337,7 @@
       </p:sp>
       <p:sp>
         <p:nvSpPr>
-          <p:cNvPr id="4" name="Oval 3"/>
+          <p:cNvPr id="4" name="deckgen:decor"/>
           <p:cNvSpPr/>
           <p:nvPr/>
         </p:nvSpPr>
@@ -13491,7 +13491,7 @@
       <p:grpSpPr/>
       <p:sp>
         <p:nvSpPr>
-          <p:cNvPr id="2" name="Oval 1"/>
+          <p:cNvPr id="2" name="deckgen:decor"/>
           <p:cNvSpPr/>
           <p:nvPr/>
         </p:nvSpPr>
@@ -13521,7 +13521,7 @@
       </p:sp>
       <p:sp>
         <p:nvSpPr>
-          <p:cNvPr id="3" name="Oval 2"/>
+          <p:cNvPr id="3" name="deckgen:decor"/>
           <p:cNvSpPr/>
           <p:nvPr/>
         </p:nvSpPr>
@@ -13551,7 +13551,7 @@
       </p:sp>
       <p:sp>
         <p:nvSpPr>
-          <p:cNvPr id="4" name="Oval 3"/>
+          <p:cNvPr id="4" name="deckgen:decor"/>
           <p:cNvSpPr/>
           <p:nvPr/>
         </p:nvSpPr>

--- a/data-eng/decks/w6d1s2.pptx
+++ b/data-eng/decks/w6d1s2.pptx
@@ -13832,7 +13832,7 @@
                 <a:ea typeface="Pretendard"/>
                 <a:cs typeface="Pretendard"/>
               </a:rPr>
-              <a:t>2 로 먼저</a:t>
+              <a:t>factor 2 로 먼저</a:t>
             </a:r>
           </a:p>
         </p:txBody>
@@ -14324,7 +14324,7 @@
                 <a:ea typeface="Pretendard"/>
                 <a:cs typeface="Pretendard"/>
               </a:rPr>
-              <a:t>1 로 다시</a:t>
+              <a:t>factor 1 로 다시</a:t>
             </a:r>
           </a:p>
         </p:txBody>

--- a/data-eng/decks/w6d1s2.pptx
+++ b/data-eng/decks/w6d1s2.pptx
@@ -4525,7 +4525,7 @@
                 <a:ea typeface="Pretendard"/>
                 <a:cs typeface="Pretendard"/>
               </a:rPr>
-              <a:t>키 A 의 세 메시지가 같은 파티션에, 입력한 순서대로</a:t>
+              <a:t>키 A 의 세 메시지가 Partition:1 에 입력 순서대로, D 는 Partition:0</a:t>
             </a:r>
           </a:p>
         </p:txBody>
@@ -5061,7 +5061,7 @@
         </p:nvSpPr>
         <p:spPr>
           <a:xfrm>
-            <a:off x="1428750" y="5486400"/>
+            <a:off x="1428750" y="5476875"/>
             <a:ext cx="419100" cy="381000"/>
           </a:xfrm>
           <a:prstGeom prst="rect">
@@ -5102,7 +5102,7 @@
         </p:nvSpPr>
         <p:spPr>
           <a:xfrm>
-            <a:off x="1905000" y="5486400"/>
+            <a:off x="1905000" y="5476875"/>
             <a:ext cx="6724650" cy="381000"/>
           </a:xfrm>
           <a:prstGeom prst="rect">
@@ -5177,7 +5177,7 @@
         </p:nvSpPr>
         <p:spPr>
           <a:xfrm>
-            <a:off x="9658350" y="5486400"/>
+            <a:off x="9658350" y="5476875"/>
             <a:ext cx="419100" cy="381000"/>
           </a:xfrm>
           <a:prstGeom prst="rect">
@@ -5218,7 +5218,7 @@
         </p:nvSpPr>
         <p:spPr>
           <a:xfrm>
-            <a:off x="10134600" y="5486400"/>
+            <a:off x="10134600" y="5476875"/>
             <a:ext cx="6724650" cy="381000"/>
           </a:xfrm>
           <a:prstGeom prst="rect">
@@ -5246,7 +5246,7 @@
                 <a:ea typeface="Pretendard"/>
                 <a:cs typeface="Pretendard"/>
               </a:rPr>
-              <a:t>자주 겪는 오류 네 가지</a:t>
+              <a:t>자주 겪는 오류 다섯 가지</a:t>
             </a:r>
           </a:p>
         </p:txBody>
@@ -5293,7 +5293,7 @@
         </p:nvSpPr>
         <p:spPr>
           <a:xfrm>
-            <a:off x="1428750" y="6515100"/>
+            <a:off x="1428750" y="6505575"/>
             <a:ext cx="419100" cy="381000"/>
           </a:xfrm>
           <a:prstGeom prst="rect">
@@ -5334,7 +5334,7 @@
         </p:nvSpPr>
         <p:spPr>
           <a:xfrm>
-            <a:off x="1905000" y="6515100"/>
+            <a:off x="1905000" y="6505575"/>
             <a:ext cx="6724650" cy="381000"/>
           </a:xfrm>
           <a:prstGeom prst="rect">
@@ -5362,7 +5362,7 @@
                 <a:ea typeface="Pretendard"/>
                 <a:cs typeface="Pretendard"/>
               </a:rPr>
-              <a:t>docker rm -f kafka · 이미지는 남기기</a:t>
+              <a:t>docker rm -fv kafka · 이미지는 남기기</a:t>
             </a:r>
           </a:p>
         </p:txBody>
@@ -5409,7 +5409,7 @@
         </p:nvSpPr>
         <p:spPr>
           <a:xfrm>
-            <a:off x="9658350" y="6515100"/>
+            <a:off x="9658350" y="6505575"/>
             <a:ext cx="419100" cy="381000"/>
           </a:xfrm>
           <a:prstGeom prst="rect">
@@ -5450,7 +5450,7 @@
         </p:nvSpPr>
         <p:spPr>
           <a:xfrm>
-            <a:off x="10134600" y="6515100"/>
+            <a:off x="10134600" y="6505575"/>
             <a:ext cx="6724650" cy="381000"/>
           </a:xfrm>
           <a:prstGeom prst="rect">
@@ -5478,7 +5478,7 @@
                 <a:ea typeface="Pretendard"/>
                 <a:cs typeface="Pretendard"/>
               </a:rPr>
-              <a:t>메모리 8GB 이상 확인</a:t>
+              <a:t>Total Memory 7.7GiB 안팎 확인</a:t>
             </a:r>
           </a:p>
         </p:txBody>
@@ -8515,7 +8515,7 @@
                 <a:ea typeface="Pretendard"/>
                 <a:cs typeface="Pretendard"/>
               </a:rPr>
-              <a:t>키를 안 주면 라운드로빈</a:t>
+              <a:t>키를 안 주면 한 칸에 몰아 담는다</a:t>
             </a:r>
           </a:p>
         </p:txBody>
@@ -8556,7 +8556,7 @@
                 <a:ea typeface="Pretendard"/>
                 <a:cs typeface="Pretendard"/>
               </a:rPr>
-              <a:t>골고루 흩어진다 — 순서가 필요 없을 때</a:t>
+              <a:t>16KB 가 차면 다음 칸으로 — 몇 줄이면 모두 한 파티션(실측)</a:t>
             </a:r>
           </a:p>
         </p:txBody>
@@ -10718,7 +10718,7 @@
                 <a:ea typeface="Pretendard"/>
                 <a:cs typeface="Pretendard"/>
               </a:rPr>
-              <a:t>docker logs kafka | grep -i "kafka server started"</a:t>
+              <a:t>docker logs kafka | grep -i "kafka server started" — 몇 초 뒤</a:t>
             </a:r>
           </a:p>
         </p:txBody>
@@ -12140,7 +12140,7 @@
                 <a:ea typeface="Pretendard"/>
                 <a:cs typeface="Pretendard"/>
               </a:rPr>
-              <a:t>console producer 는 한 줄이 메시지 하나 · A:첫 번째 / A:두 번째 / B:다른 키 / A:세 번째 순으로 입력해 본다</a:t>
+              <a:t>console producer 는 한 줄이 메시지 하나 · A:첫 번째 / A:두 번째 / D:다른 키 / A:세 번째 순으로 입력해 본다 · 콜론 없는 줄은 Producer 를 멈춘다</a:t>
             </a:r>
           </a:p>
         </p:txBody>
@@ -12659,7 +12659,7 @@
                 <a:ea typeface="Pretendard"/>
                 <a:cs typeface="Pretendard"/>
               </a:rPr>
-              <a:t>Producer 한 줄 = 메시지 하나</a:t>
+              <a:t>Producer 한 줄 = 메시지 하나 · 한글도 그대로</a:t>
             </a:r>
           </a:p>
         </p:txBody>
@@ -12846,7 +12846,7 @@
                 <a:ea typeface="Pretendard"/>
                 <a:cs typeface="Pretendard"/>
               </a:rPr>
-              <a:t>아까 읽은 메시지가 다시 전부 나온다 — 읽어도 사라지지 않는다</a:t>
+              <a:t>Ctrl+C 에 Processed a total of 3 messages — 다시 켜면 전부 다시 나온다</a:t>
             </a:r>
           </a:p>
         </p:txBody>
@@ -12992,7 +12992,7 @@
                 <a:ea typeface="Pretendard"/>
                 <a:cs typeface="Pretendard"/>
               </a:rPr>
-              <a:t>5. 키 A 의 세 메시지</a:t>
+              <a:t>5. 키 A 는 Partition:1, D 는 Partition:0</a:t>
             </a:r>
           </a:p>
         </p:txBody>
@@ -13033,7 +13033,7 @@
                 <a:ea typeface="Pretendard"/>
                 <a:cs typeface="Pretendard"/>
               </a:rPr>
-              <a:t>모두 같은 파티션 번호, 입력한 순서 그대로 — B 는 다른 파티션일 수 있다</a:t>
+              <a:t>A 셋은 입력 순서 그대로 — 키 없이 보낸 것은 null, 한 칸에 모여 있다</a:t>
             </a:r>
           </a:p>
         </p:txBody>
@@ -13179,7 +13179,7 @@
                 <a:ea typeface="Pretendard"/>
                 <a:cs typeface="Pretendard"/>
               </a:rPr>
-              <a:t>6. hello-stream:0:N</a:t>
+              <a:t>6. hello-stream:0:5 · 1:3 · 2:0 (실측)</a:t>
             </a:r>
           </a:p>
         </p:txBody>
@@ -13727,7 +13727,7 @@
                 <a:ea typeface="Pretendard"/>
                 <a:cs typeface="Pretendard"/>
               </a:rPr>
-              <a:t>「복제본 없음」이 무슨 뜻인지 실패로 확인합니다 — 기동 직후 CLI 를 바로 치면 Connection refused 도 함께 보게 됩니다</a:t>
+              <a:t>「복제본 없음」이 무슨 뜻인지 실패로 확인합니다 — 2단계 토픽을 만든 뒤 hello-rf2 로</a:t>
             </a:r>
           </a:p>
         </p:txBody>
@@ -13832,7 +13832,7 @@
                 <a:ea typeface="Pretendard"/>
                 <a:cs typeface="Pretendard"/>
               </a:rPr>
-              <a:t>factor 2 로 먼저</a:t>
+              <a:t>factor 2 로</a:t>
             </a:r>
           </a:p>
         </p:txBody>
@@ -13891,7 +13891,7 @@
                 <a:ea typeface="Pretendard"/>
                 <a:cs typeface="Pretendard"/>
               </a:rPr>
-              <a:t>hello-stream</a:t>
+              <a:t>hello-rf2</a:t>
             </a:r>
           </a:p>
         </p:txBody>
@@ -14037,7 +14037,7 @@
                 <a:ea typeface="Pretendard"/>
                 <a:cs typeface="Pretendard"/>
               </a:rPr>
-              <a:t>오류 메시지를</a:t>
+              <a:t>only 1 broker(s)</a:t>
             </a:r>
           </a:p>
           <a:p>
@@ -14055,7 +14055,7 @@
                 <a:ea typeface="Pretendard"/>
                 <a:cs typeface="Pretendard"/>
               </a:rPr>
-              <a:t>읽어 본다</a:t>
+              <a:t>are registered</a:t>
             </a:r>
           </a:p>
         </p:txBody>
@@ -14324,7 +14324,7 @@
                 <a:ea typeface="Pretendard"/>
                 <a:cs typeface="Pretendard"/>
               </a:rPr>
-              <a:t>factor 1 로 다시</a:t>
+              <a:t>운영에서는</a:t>
             </a:r>
           </a:p>
         </p:txBody>
@@ -14365,7 +14365,7 @@
                 <a:ea typeface="Pretendard"/>
                 <a:cs typeface="Pretendard"/>
               </a:rPr>
-              <a:t>운영은 브로커 3대</a:t>
+              <a:t>브로커 3대</a:t>
             </a:r>
           </a:p>
           <a:p>
